--- a/심사_카카오페이_제출자료.pptx
+++ b/심사_카카오페이_제출자료.pptx
@@ -5,16 +5,16 @@
     <p:sldMasterId id="2147483648" r:id="rId1"/>
   </p:sldMasterIdLst>
   <p:sldIdLst>
-    <p:sldId id="256" r:id="rId7"/>
-    <p:sldId id="257" r:id="rId8"/>
-    <p:sldId id="258" r:id="rId9"/>
-    <p:sldId id="259" r:id="rId10"/>
-    <p:sldId id="260" r:id="rId11"/>
-    <p:sldId id="261" r:id="rId12"/>
-    <p:sldId id="262" r:id="rId13"/>
-    <p:sldId id="263" r:id="rId14"/>
+    <p:sldId id="256" r:id="rId2"/>
+    <p:sldId id="257" r:id="rId3"/>
+    <p:sldId id="258" r:id="rId4"/>
+    <p:sldId id="259" r:id="rId5"/>
+    <p:sldId id="260" r:id="rId6"/>
+    <p:sldId id="261" r:id="rId7"/>
+    <p:sldId id="262" r:id="rId8"/>
+    <p:sldId id="263" r:id="rId9"/>
   </p:sldIdLst>
-  <p:sldSz cx="12188952" cy="6858000" type="screen4x3"/>
+  <p:sldSz cx="12188825" cy="6858000"/>
   <p:notesSz cx="6858000" cy="9144000"/>
   <p:defaultTextStyle>
     <a:defPPr>
@@ -111,6 +111,22 @@
       </a:defRPr>
     </a:lvl9pPr>
   </p:defaultTextStyle>
+  <p:extLst>
+    <p:ext uri="{EFAFB233-063F-42B5-8137-9DF3F51BA10A}">
+      <p15:sldGuideLst xmlns:p15="http://schemas.microsoft.com/office/powerpoint/2012/main">
+        <p15:guide id="1" orient="horz" pos="2160">
+          <p15:clr>
+            <a:srgbClr val="A4A3A4"/>
+          </p15:clr>
+        </p15:guide>
+        <p15:guide id="2" pos="2880">
+          <p15:clr>
+            <a:srgbClr val="A4A3A4"/>
+          </p15:clr>
+        </p15:guide>
+      </p15:sldGuideLst>
+    </p:ext>
+  </p:extLst>
 </p:presentation>
 </file>
 
@@ -152,10 +168,9 @@
           <a:lstStyle/>
           <a:p>
             <a:r>
-              <a:rPr lang="en-US" smtClean="0"/>
+              <a:rPr lang="en-US"/>
               <a:t>Click to edit Master title style</a:t>
             </a:r>
-            <a:endParaRPr lang="en-US"/>
           </a:p>
         </p:txBody>
       </p:sp>
@@ -271,10 +286,9 @@
           </a:lstStyle>
           <a:p>
             <a:r>
-              <a:rPr lang="en-US" smtClean="0"/>
+              <a:rPr lang="en-US"/>
               <a:t>Click to edit Master subtitle style</a:t>
             </a:r>
-            <a:endParaRPr lang="en-US"/>
           </a:p>
         </p:txBody>
       </p:sp>
@@ -295,7 +309,7 @@
           <a:p>
             <a:fld id="{5BCAD085-E8A6-8845-BD4E-CB4CCA059FC4}" type="datetimeFigureOut">
               <a:rPr lang="en-US" smtClean="0"/>
-              <a:t>1/27/13</a:t>
+              <a:t>5/14/26</a:t>
             </a:fld>
             <a:endParaRPr lang="en-US"/>
           </a:p>
@@ -389,10 +403,9 @@
           <a:lstStyle/>
           <a:p>
             <a:r>
-              <a:rPr lang="en-US" smtClean="0"/>
+              <a:rPr lang="en-US"/>
               <a:t>Click to edit Master title style</a:t>
             </a:r>
-            <a:endParaRPr lang="en-US"/>
           </a:p>
         </p:txBody>
       </p:sp>
@@ -413,38 +426,37 @@
           <a:p>
             <a:pPr lvl="0"/>
             <a:r>
-              <a:rPr lang="en-US" smtClean="0"/>
+              <a:rPr lang="en-US"/>
               <a:t>Click to edit Master text styles</a:t>
             </a:r>
           </a:p>
           <a:p>
             <a:pPr lvl="1"/>
             <a:r>
-              <a:rPr lang="en-US" smtClean="0"/>
+              <a:rPr lang="en-US"/>
               <a:t>Second level</a:t>
             </a:r>
           </a:p>
           <a:p>
             <a:pPr lvl="2"/>
             <a:r>
-              <a:rPr lang="en-US" smtClean="0"/>
+              <a:rPr lang="en-US"/>
               <a:t>Third level</a:t>
             </a:r>
           </a:p>
           <a:p>
             <a:pPr lvl="3"/>
             <a:r>
-              <a:rPr lang="en-US" smtClean="0"/>
+              <a:rPr lang="en-US"/>
               <a:t>Fourth level</a:t>
             </a:r>
           </a:p>
           <a:p>
             <a:pPr lvl="4"/>
             <a:r>
-              <a:rPr lang="en-US" smtClean="0"/>
+              <a:rPr lang="en-US"/>
               <a:t>Fifth level</a:t>
             </a:r>
-            <a:endParaRPr lang="en-US"/>
           </a:p>
         </p:txBody>
       </p:sp>
@@ -465,7 +477,7 @@
           <a:p>
             <a:fld id="{5BCAD085-E8A6-8845-BD4E-CB4CCA059FC4}" type="datetimeFigureOut">
               <a:rPr lang="en-US" smtClean="0"/>
-              <a:t>1/27/13</a:t>
+              <a:t>5/14/26</a:t>
             </a:fld>
             <a:endParaRPr lang="en-US"/>
           </a:p>
@@ -564,10 +576,9 @@
           <a:lstStyle/>
           <a:p>
             <a:r>
-              <a:rPr lang="en-US" smtClean="0"/>
+              <a:rPr lang="en-US"/>
               <a:t>Click to edit Master title style</a:t>
             </a:r>
-            <a:endParaRPr lang="en-US"/>
           </a:p>
         </p:txBody>
       </p:sp>
@@ -593,38 +604,37 @@
           <a:p>
             <a:pPr lvl="0"/>
             <a:r>
-              <a:rPr lang="en-US" smtClean="0"/>
+              <a:rPr lang="en-US"/>
               <a:t>Click to edit Master text styles</a:t>
             </a:r>
           </a:p>
           <a:p>
             <a:pPr lvl="1"/>
             <a:r>
-              <a:rPr lang="en-US" smtClean="0"/>
+              <a:rPr lang="en-US"/>
               <a:t>Second level</a:t>
             </a:r>
           </a:p>
           <a:p>
             <a:pPr lvl="2"/>
             <a:r>
-              <a:rPr lang="en-US" smtClean="0"/>
+              <a:rPr lang="en-US"/>
               <a:t>Third level</a:t>
             </a:r>
           </a:p>
           <a:p>
             <a:pPr lvl="3"/>
             <a:r>
-              <a:rPr lang="en-US" smtClean="0"/>
+              <a:rPr lang="en-US"/>
               <a:t>Fourth level</a:t>
             </a:r>
           </a:p>
           <a:p>
             <a:pPr lvl="4"/>
             <a:r>
-              <a:rPr lang="en-US" smtClean="0"/>
+              <a:rPr lang="en-US"/>
               <a:t>Fifth level</a:t>
             </a:r>
-            <a:endParaRPr lang="en-US"/>
           </a:p>
         </p:txBody>
       </p:sp>
@@ -645,7 +655,7 @@
           <a:p>
             <a:fld id="{5BCAD085-E8A6-8845-BD4E-CB4CCA059FC4}" type="datetimeFigureOut">
               <a:rPr lang="en-US" smtClean="0"/>
-              <a:t>1/27/13</a:t>
+              <a:t>5/14/26</a:t>
             </a:fld>
             <a:endParaRPr lang="en-US"/>
           </a:p>
@@ -739,10 +749,9 @@
           <a:lstStyle/>
           <a:p>
             <a:r>
-              <a:rPr lang="en-US" smtClean="0"/>
+              <a:rPr lang="en-US"/>
               <a:t>Click to edit Master title style</a:t>
             </a:r>
-            <a:endParaRPr lang="en-US"/>
           </a:p>
         </p:txBody>
       </p:sp>
@@ -763,38 +772,37 @@
           <a:p>
             <a:pPr lvl="0"/>
             <a:r>
-              <a:rPr lang="en-US" smtClean="0"/>
+              <a:rPr lang="en-US"/>
               <a:t>Click to edit Master text styles</a:t>
             </a:r>
           </a:p>
           <a:p>
             <a:pPr lvl="1"/>
             <a:r>
-              <a:rPr lang="en-US" smtClean="0"/>
+              <a:rPr lang="en-US"/>
               <a:t>Second level</a:t>
             </a:r>
           </a:p>
           <a:p>
             <a:pPr lvl="2"/>
             <a:r>
-              <a:rPr lang="en-US" smtClean="0"/>
+              <a:rPr lang="en-US"/>
               <a:t>Third level</a:t>
             </a:r>
           </a:p>
           <a:p>
             <a:pPr lvl="3"/>
             <a:r>
-              <a:rPr lang="en-US" smtClean="0"/>
+              <a:rPr lang="en-US"/>
               <a:t>Fourth level</a:t>
             </a:r>
           </a:p>
           <a:p>
             <a:pPr lvl="4"/>
             <a:r>
-              <a:rPr lang="en-US" smtClean="0"/>
+              <a:rPr lang="en-US"/>
               <a:t>Fifth level</a:t>
             </a:r>
-            <a:endParaRPr lang="en-US"/>
           </a:p>
         </p:txBody>
       </p:sp>
@@ -815,7 +823,7 @@
           <a:p>
             <a:fld id="{5BCAD085-E8A6-8845-BD4E-CB4CCA059FC4}" type="datetimeFigureOut">
               <a:rPr lang="en-US" smtClean="0"/>
-              <a:t>1/27/13</a:t>
+              <a:t>5/14/26</a:t>
             </a:fld>
             <a:endParaRPr lang="en-US"/>
           </a:p>
@@ -918,10 +926,9 @@
           </a:lstStyle>
           <a:p>
             <a:r>
-              <a:rPr lang="en-US" smtClean="0"/>
+              <a:rPr lang="en-US"/>
               <a:t>Click to edit Master title style</a:t>
             </a:r>
-            <a:endParaRPr lang="en-US"/>
           </a:p>
         </p:txBody>
       </p:sp>
@@ -1038,7 +1045,7 @@
           <a:p>
             <a:pPr lvl="0"/>
             <a:r>
-              <a:rPr lang="en-US" smtClean="0"/>
+              <a:rPr lang="en-US"/>
               <a:t>Click to edit Master text styles</a:t>
             </a:r>
           </a:p>
@@ -1061,7 +1068,7 @@
           <a:p>
             <a:fld id="{5BCAD085-E8A6-8845-BD4E-CB4CCA059FC4}" type="datetimeFigureOut">
               <a:rPr lang="en-US" smtClean="0"/>
-              <a:t>1/27/13</a:t>
+              <a:t>5/14/26</a:t>
             </a:fld>
             <a:endParaRPr lang="en-US"/>
           </a:p>
@@ -1155,10 +1162,9 @@
           <a:lstStyle/>
           <a:p>
             <a:r>
-              <a:rPr lang="en-US" smtClean="0"/>
+              <a:rPr lang="en-US"/>
               <a:t>Click to edit Master title style</a:t>
             </a:r>
-            <a:endParaRPr lang="en-US"/>
           </a:p>
         </p:txBody>
       </p:sp>
@@ -1212,38 +1218,37 @@
           <a:p>
             <a:pPr lvl="0"/>
             <a:r>
-              <a:rPr lang="en-US" smtClean="0"/>
+              <a:rPr lang="en-US"/>
               <a:t>Click to edit Master text styles</a:t>
             </a:r>
           </a:p>
           <a:p>
             <a:pPr lvl="1"/>
             <a:r>
-              <a:rPr lang="en-US" smtClean="0"/>
+              <a:rPr lang="en-US"/>
               <a:t>Second level</a:t>
             </a:r>
           </a:p>
           <a:p>
             <a:pPr lvl="2"/>
             <a:r>
-              <a:rPr lang="en-US" smtClean="0"/>
+              <a:rPr lang="en-US"/>
               <a:t>Third level</a:t>
             </a:r>
           </a:p>
           <a:p>
             <a:pPr lvl="3"/>
             <a:r>
-              <a:rPr lang="en-US" smtClean="0"/>
+              <a:rPr lang="en-US"/>
               <a:t>Fourth level</a:t>
             </a:r>
           </a:p>
           <a:p>
             <a:pPr lvl="4"/>
             <a:r>
-              <a:rPr lang="en-US" smtClean="0"/>
+              <a:rPr lang="en-US"/>
               <a:t>Fifth level</a:t>
             </a:r>
-            <a:endParaRPr lang="en-US"/>
           </a:p>
         </p:txBody>
       </p:sp>
@@ -1297,38 +1302,37 @@
           <a:p>
             <a:pPr lvl="0"/>
             <a:r>
-              <a:rPr lang="en-US" smtClean="0"/>
+              <a:rPr lang="en-US"/>
               <a:t>Click to edit Master text styles</a:t>
             </a:r>
           </a:p>
           <a:p>
             <a:pPr lvl="1"/>
             <a:r>
-              <a:rPr lang="en-US" smtClean="0"/>
+              <a:rPr lang="en-US"/>
               <a:t>Second level</a:t>
             </a:r>
           </a:p>
           <a:p>
             <a:pPr lvl="2"/>
             <a:r>
-              <a:rPr lang="en-US" smtClean="0"/>
+              <a:rPr lang="en-US"/>
               <a:t>Third level</a:t>
             </a:r>
           </a:p>
           <a:p>
             <a:pPr lvl="3"/>
             <a:r>
-              <a:rPr lang="en-US" smtClean="0"/>
+              <a:rPr lang="en-US"/>
               <a:t>Fourth level</a:t>
             </a:r>
           </a:p>
           <a:p>
             <a:pPr lvl="4"/>
             <a:r>
-              <a:rPr lang="en-US" smtClean="0"/>
+              <a:rPr lang="en-US"/>
               <a:t>Fifth level</a:t>
             </a:r>
-            <a:endParaRPr lang="en-US"/>
           </a:p>
         </p:txBody>
       </p:sp>
@@ -1349,7 +1353,7 @@
           <a:p>
             <a:fld id="{5BCAD085-E8A6-8845-BD4E-CB4CCA059FC4}" type="datetimeFigureOut">
               <a:rPr lang="en-US" smtClean="0"/>
-              <a:t>1/27/13</a:t>
+              <a:t>5/14/26</a:t>
             </a:fld>
             <a:endParaRPr lang="en-US"/>
           </a:p>
@@ -1447,10 +1451,9 @@
           </a:lstStyle>
           <a:p>
             <a:r>
-              <a:rPr lang="en-US" smtClean="0"/>
+              <a:rPr lang="en-US"/>
               <a:t>Click to edit Master title style</a:t>
             </a:r>
-            <a:endParaRPr lang="en-US"/>
           </a:p>
         </p:txBody>
       </p:sp>
@@ -1513,7 +1516,7 @@
           <a:p>
             <a:pPr lvl="0"/>
             <a:r>
-              <a:rPr lang="en-US" smtClean="0"/>
+              <a:rPr lang="en-US"/>
               <a:t>Click to edit Master text styles</a:t>
             </a:r>
           </a:p>
@@ -1569,38 +1572,37 @@
           <a:p>
             <a:pPr lvl="0"/>
             <a:r>
-              <a:rPr lang="en-US" smtClean="0"/>
+              <a:rPr lang="en-US"/>
               <a:t>Click to edit Master text styles</a:t>
             </a:r>
           </a:p>
           <a:p>
             <a:pPr lvl="1"/>
             <a:r>
-              <a:rPr lang="en-US" smtClean="0"/>
+              <a:rPr lang="en-US"/>
               <a:t>Second level</a:t>
             </a:r>
           </a:p>
           <a:p>
             <a:pPr lvl="2"/>
             <a:r>
-              <a:rPr lang="en-US" smtClean="0"/>
+              <a:rPr lang="en-US"/>
               <a:t>Third level</a:t>
             </a:r>
           </a:p>
           <a:p>
             <a:pPr lvl="3"/>
             <a:r>
-              <a:rPr lang="en-US" smtClean="0"/>
+              <a:rPr lang="en-US"/>
               <a:t>Fourth level</a:t>
             </a:r>
           </a:p>
           <a:p>
             <a:pPr lvl="4"/>
             <a:r>
-              <a:rPr lang="en-US" smtClean="0"/>
+              <a:rPr lang="en-US"/>
               <a:t>Fifth level</a:t>
             </a:r>
-            <a:endParaRPr lang="en-US"/>
           </a:p>
         </p:txBody>
       </p:sp>
@@ -1663,7 +1665,7 @@
           <a:p>
             <a:pPr lvl="0"/>
             <a:r>
-              <a:rPr lang="en-US" smtClean="0"/>
+              <a:rPr lang="en-US"/>
               <a:t>Click to edit Master text styles</a:t>
             </a:r>
           </a:p>
@@ -1719,38 +1721,37 @@
           <a:p>
             <a:pPr lvl="0"/>
             <a:r>
-              <a:rPr lang="en-US" smtClean="0"/>
+              <a:rPr lang="en-US"/>
               <a:t>Click to edit Master text styles</a:t>
             </a:r>
           </a:p>
           <a:p>
             <a:pPr lvl="1"/>
             <a:r>
-              <a:rPr lang="en-US" smtClean="0"/>
+              <a:rPr lang="en-US"/>
               <a:t>Second level</a:t>
             </a:r>
           </a:p>
           <a:p>
             <a:pPr lvl="2"/>
             <a:r>
-              <a:rPr lang="en-US" smtClean="0"/>
+              <a:rPr lang="en-US"/>
               <a:t>Third level</a:t>
             </a:r>
           </a:p>
           <a:p>
             <a:pPr lvl="3"/>
             <a:r>
-              <a:rPr lang="en-US" smtClean="0"/>
+              <a:rPr lang="en-US"/>
               <a:t>Fourth level</a:t>
             </a:r>
           </a:p>
           <a:p>
             <a:pPr lvl="4"/>
             <a:r>
-              <a:rPr lang="en-US" smtClean="0"/>
+              <a:rPr lang="en-US"/>
               <a:t>Fifth level</a:t>
             </a:r>
-            <a:endParaRPr lang="en-US"/>
           </a:p>
         </p:txBody>
       </p:sp>
@@ -1771,7 +1772,7 @@
           <a:p>
             <a:fld id="{5BCAD085-E8A6-8845-BD4E-CB4CCA059FC4}" type="datetimeFigureOut">
               <a:rPr lang="en-US" smtClean="0"/>
-              <a:t>1/27/13</a:t>
+              <a:t>5/14/26</a:t>
             </a:fld>
             <a:endParaRPr lang="en-US"/>
           </a:p>
@@ -1865,10 +1866,9 @@
           <a:lstStyle/>
           <a:p>
             <a:r>
-              <a:rPr lang="en-US" smtClean="0"/>
+              <a:rPr lang="en-US"/>
               <a:t>Click to edit Master title style</a:t>
             </a:r>
-            <a:endParaRPr lang="en-US"/>
           </a:p>
         </p:txBody>
       </p:sp>
@@ -1889,7 +1889,7 @@
           <a:p>
             <a:fld id="{5BCAD085-E8A6-8845-BD4E-CB4CCA059FC4}" type="datetimeFigureOut">
               <a:rPr lang="en-US" smtClean="0"/>
-              <a:t>1/27/13</a:t>
+              <a:t>5/14/26</a:t>
             </a:fld>
             <a:endParaRPr lang="en-US"/>
           </a:p>
@@ -1984,7 +1984,7 @@
           <a:p>
             <a:fld id="{5BCAD085-E8A6-8845-BD4E-CB4CCA059FC4}" type="datetimeFigureOut">
               <a:rPr lang="en-US" smtClean="0"/>
-              <a:t>1/27/13</a:t>
+              <a:t>5/14/26</a:t>
             </a:fld>
             <a:endParaRPr lang="en-US"/>
           </a:p>
@@ -2087,10 +2087,9 @@
           </a:lstStyle>
           <a:p>
             <a:r>
-              <a:rPr lang="en-US" smtClean="0"/>
+              <a:rPr lang="en-US"/>
               <a:t>Click to edit Master title style</a:t>
             </a:r>
-            <a:endParaRPr lang="en-US"/>
           </a:p>
         </p:txBody>
       </p:sp>
@@ -2144,38 +2143,37 @@
           <a:p>
             <a:pPr lvl="0"/>
             <a:r>
-              <a:rPr lang="en-US" smtClean="0"/>
+              <a:rPr lang="en-US"/>
               <a:t>Click to edit Master text styles</a:t>
             </a:r>
           </a:p>
           <a:p>
             <a:pPr lvl="1"/>
             <a:r>
-              <a:rPr lang="en-US" smtClean="0"/>
+              <a:rPr lang="en-US"/>
               <a:t>Second level</a:t>
             </a:r>
           </a:p>
           <a:p>
             <a:pPr lvl="2"/>
             <a:r>
-              <a:rPr lang="en-US" smtClean="0"/>
+              <a:rPr lang="en-US"/>
               <a:t>Third level</a:t>
             </a:r>
           </a:p>
           <a:p>
             <a:pPr lvl="3"/>
             <a:r>
-              <a:rPr lang="en-US" smtClean="0"/>
+              <a:rPr lang="en-US"/>
               <a:t>Fourth level</a:t>
             </a:r>
           </a:p>
           <a:p>
             <a:pPr lvl="4"/>
             <a:r>
-              <a:rPr lang="en-US" smtClean="0"/>
+              <a:rPr lang="en-US"/>
               <a:t>Fifth level</a:t>
             </a:r>
-            <a:endParaRPr lang="en-US"/>
           </a:p>
         </p:txBody>
       </p:sp>
@@ -2238,7 +2236,7 @@
           <a:p>
             <a:pPr lvl="0"/>
             <a:r>
-              <a:rPr lang="en-US" smtClean="0"/>
+              <a:rPr lang="en-US"/>
               <a:t>Click to edit Master text styles</a:t>
             </a:r>
           </a:p>
@@ -2261,7 +2259,7 @@
           <a:p>
             <a:fld id="{5BCAD085-E8A6-8845-BD4E-CB4CCA059FC4}" type="datetimeFigureOut">
               <a:rPr lang="en-US" smtClean="0"/>
-              <a:t>1/27/13</a:t>
+              <a:t>5/14/26</a:t>
             </a:fld>
             <a:endParaRPr lang="en-US"/>
           </a:p>
@@ -2364,10 +2362,9 @@
           </a:lstStyle>
           <a:p>
             <a:r>
-              <a:rPr lang="en-US" smtClean="0"/>
+              <a:rPr lang="en-US"/>
               <a:t>Click to edit Master title style</a:t>
             </a:r>
-            <a:endParaRPr lang="en-US"/>
           </a:p>
         </p:txBody>
       </p:sp>
@@ -2491,7 +2488,7 @@
           <a:p>
             <a:pPr lvl="0"/>
             <a:r>
-              <a:rPr lang="en-US" smtClean="0"/>
+              <a:rPr lang="en-US"/>
               <a:t>Click to edit Master text styles</a:t>
             </a:r>
           </a:p>
@@ -2514,7 +2511,7 @@
           <a:p>
             <a:fld id="{5BCAD085-E8A6-8845-BD4E-CB4CCA059FC4}" type="datetimeFigureOut">
               <a:rPr lang="en-US" smtClean="0"/>
-              <a:t>1/27/13</a:t>
+              <a:t>5/14/26</a:t>
             </a:fld>
             <a:endParaRPr lang="en-US"/>
           </a:p>
@@ -2623,10 +2620,9 @@
           <a:lstStyle/>
           <a:p>
             <a:r>
-              <a:rPr lang="en-US" smtClean="0"/>
+              <a:rPr lang="en-US"/>
               <a:t>Click to edit Master title style</a:t>
             </a:r>
-            <a:endParaRPr lang="en-US"/>
           </a:p>
         </p:txBody>
       </p:sp>
@@ -2657,38 +2653,37 @@
           <a:p>
             <a:pPr lvl="0"/>
             <a:r>
-              <a:rPr lang="en-US" smtClean="0"/>
+              <a:rPr lang="en-US"/>
               <a:t>Click to edit Master text styles</a:t>
             </a:r>
           </a:p>
           <a:p>
             <a:pPr lvl="1"/>
             <a:r>
-              <a:rPr lang="en-US" smtClean="0"/>
+              <a:rPr lang="en-US"/>
               <a:t>Second level</a:t>
             </a:r>
           </a:p>
           <a:p>
             <a:pPr lvl="2"/>
             <a:r>
-              <a:rPr lang="en-US" smtClean="0"/>
+              <a:rPr lang="en-US"/>
               <a:t>Third level</a:t>
             </a:r>
           </a:p>
           <a:p>
             <a:pPr lvl="3"/>
             <a:r>
-              <a:rPr lang="en-US" smtClean="0"/>
+              <a:rPr lang="en-US"/>
               <a:t>Fourth level</a:t>
             </a:r>
           </a:p>
           <a:p>
             <a:pPr lvl="4"/>
             <a:r>
-              <a:rPr lang="en-US" smtClean="0"/>
+              <a:rPr lang="en-US"/>
               <a:t>Fifth level</a:t>
             </a:r>
-            <a:endParaRPr lang="en-US"/>
           </a:p>
         </p:txBody>
       </p:sp>
@@ -2727,7 +2722,7 @@
           <a:p>
             <a:fld id="{5BCAD085-E8A6-8845-BD4E-CB4CCA059FC4}" type="datetimeFigureOut">
               <a:rPr lang="en-US" smtClean="0"/>
-              <a:t>1/27/13</a:t>
+              <a:t>5/14/26</a:t>
             </a:fld>
             <a:endParaRPr lang="en-US"/>
           </a:p>
@@ -3086,7 +3081,7 @@
 </file>
 
 <file path=ppt/slides/slide1.xml><?xml version="1.0" encoding="utf-8"?>
-<p:sld xmlns:a="http://schemas.openxmlformats.org/drawingml/2006/main" xmlns:p="http://schemas.openxmlformats.org/presentationml/2006/main" xmlns:r="http://schemas.openxmlformats.org/officeDocument/2006/relationships">
+<p:sld xmlns:a="http://schemas.openxmlformats.org/drawingml/2006/main" xmlns:r="http://schemas.openxmlformats.org/officeDocument/2006/relationships" xmlns:p="http://schemas.openxmlformats.org/presentationml/2006/main">
   <p:cSld>
     <p:bg>
       <p:bgPr>
@@ -3102,7 +3097,14 @@
         <p:cNvGrpSpPr/>
         <p:nvPr/>
       </p:nvGrpSpPr>
-      <p:grpSpPr/>
+      <p:grpSpPr>
+        <a:xfrm>
+          <a:off x="0" y="0"/>
+          <a:ext cx="0" cy="0"/>
+          <a:chOff x="0" y="0"/>
+          <a:chExt cx="0" cy="0"/>
+        </a:xfrm>
+      </p:grpSpPr>
       <p:sp>
         <p:nvSpPr>
           <p:cNvPr id="2" name="TextBox 1"/>
@@ -3217,7 +3219,7 @@
 </file>
 
 <file path=ppt/slides/slide2.xml><?xml version="1.0" encoding="utf-8"?>
-<p:sld xmlns:a="http://schemas.openxmlformats.org/drawingml/2006/main" xmlns:p="http://schemas.openxmlformats.org/presentationml/2006/main" xmlns:r="http://schemas.openxmlformats.org/officeDocument/2006/relationships">
+<p:sld xmlns:a="http://schemas.openxmlformats.org/drawingml/2006/main" xmlns:r="http://schemas.openxmlformats.org/officeDocument/2006/relationships" xmlns:p="http://schemas.openxmlformats.org/presentationml/2006/main">
   <p:cSld>
     <p:spTree>
       <p:nvGrpSpPr>
@@ -3225,7 +3227,14 @@
         <p:cNvGrpSpPr/>
         <p:nvPr/>
       </p:nvGrpSpPr>
-      <p:grpSpPr/>
+      <p:grpSpPr>
+        <a:xfrm>
+          <a:off x="0" y="0"/>
+          <a:ext cx="0" cy="0"/>
+          <a:chOff x="0" y="0"/>
+          <a:chExt cx="0" cy="0"/>
+        </a:xfrm>
+      </p:grpSpPr>
       <p:sp>
         <p:nvSpPr>
           <p:cNvPr id="2" name="TextBox 1"/>
@@ -3310,7 +3319,7 @@
           </a:fontRef>
         </p:style>
         <p:txBody>
-          <a:bodyPr rtlCol="0" anchor="ctr" lIns="137160"/>
+          <a:bodyPr lIns="137160" rtlCol="0" anchor="ctr"/>
           <a:lstStyle/>
           <a:p>
             <a:pPr algn="l"/>
@@ -3326,30 +3335,6 @@
           </a:p>
         </p:txBody>
       </p:sp>
-      <p:pic>
-        <p:nvPicPr>
-          <p:cNvPr id="4" name="Picture 3" descr="01_main.png"/>
-          <p:cNvPicPr>
-            <a:picLocks noChangeAspect="1"/>
-          </p:cNvPicPr>
-          <p:nvPr/>
-        </p:nvPicPr>
-        <p:blipFill>
-          <a:blip r:embed="rId2"/>
-          <a:stretch>
-            <a:fillRect/>
-          </a:stretch>
-        </p:blipFill>
-        <p:spPr>
-          <a:xfrm>
-            <a:off x="2290572" y="1874519"/>
-            <a:ext cx="7607808" cy="4754880"/>
-          </a:xfrm>
-          <a:prstGeom prst="rect">
-            <a:avLst/>
-          </a:prstGeom>
-        </p:spPr>
-      </p:pic>
       <p:sp>
         <p:nvSpPr>
           <p:cNvPr id="5" name="Rectangle 4"/>
@@ -3388,7 +3373,7 @@
           </a:fontRef>
         </p:style>
         <p:txBody>
-          <a:bodyPr rtlCol="0" anchor="ctr" lIns="0" tIns="0" bIns="0" rIns="0"/>
+          <a:bodyPr lIns="0" tIns="0" rIns="0" bIns="0" rtlCol="0" anchor="ctr"/>
           <a:lstStyle/>
           <a:p>
             <a:pPr algn="ctr"/>
@@ -3438,6 +3423,36 @@
           </a:p>
         </p:txBody>
       </p:sp>
+      <p:pic>
+        <p:nvPicPr>
+          <p:cNvPr id="8" name="그림 7">
+            <a:extLst>
+              <a:ext uri="{FF2B5EF4-FFF2-40B4-BE49-F238E27FC236}">
+                <a16:creationId xmlns:a16="http://schemas.microsoft.com/office/drawing/2014/main" id="{6E02C677-7EC4-61B5-F75A-627DBD2E1AAD}"/>
+              </a:ext>
+            </a:extLst>
+          </p:cNvPr>
+          <p:cNvPicPr>
+            <a:picLocks noChangeAspect="1"/>
+          </p:cNvPicPr>
+          <p:nvPr/>
+        </p:nvPicPr>
+        <p:blipFill>
+          <a:blip r:embed="rId2"/>
+          <a:stretch>
+            <a:fillRect/>
+          </a:stretch>
+        </p:blipFill>
+        <p:spPr>
+          <a:xfrm>
+            <a:off x="3931920" y="1810053"/>
+            <a:ext cx="7772400" cy="5047947"/>
+          </a:xfrm>
+          <a:prstGeom prst="rect">
+            <a:avLst/>
+          </a:prstGeom>
+        </p:spPr>
+      </p:pic>
     </p:spTree>
   </p:cSld>
   <p:clrMapOvr>
@@ -3447,7 +3462,7 @@
 </file>
 
 <file path=ppt/slides/slide3.xml><?xml version="1.0" encoding="utf-8"?>
-<p:sld xmlns:a="http://schemas.openxmlformats.org/drawingml/2006/main" xmlns:p="http://schemas.openxmlformats.org/presentationml/2006/main" xmlns:r="http://schemas.openxmlformats.org/officeDocument/2006/relationships">
+<p:sld xmlns:a="http://schemas.openxmlformats.org/drawingml/2006/main" xmlns:r="http://schemas.openxmlformats.org/officeDocument/2006/relationships" xmlns:p="http://schemas.openxmlformats.org/presentationml/2006/main">
   <p:cSld>
     <p:spTree>
       <p:nvGrpSpPr>
@@ -3455,7 +3470,14 @@
         <p:cNvGrpSpPr/>
         <p:nvPr/>
       </p:nvGrpSpPr>
-      <p:grpSpPr/>
+      <p:grpSpPr>
+        <a:xfrm>
+          <a:off x="0" y="0"/>
+          <a:ext cx="0" cy="0"/>
+          <a:chOff x="0" y="0"/>
+          <a:chExt cx="0" cy="0"/>
+        </a:xfrm>
+      </p:grpSpPr>
       <p:sp>
         <p:nvSpPr>
           <p:cNvPr id="2" name="TextBox 1"/>
@@ -3540,7 +3562,7 @@
           </a:fontRef>
         </p:style>
         <p:txBody>
-          <a:bodyPr rtlCol="0" anchor="ctr" lIns="137160"/>
+          <a:bodyPr lIns="137160" rtlCol="0" anchor="ctr"/>
           <a:lstStyle/>
           <a:p>
             <a:pPr algn="l"/>
@@ -3556,30 +3578,6 @@
           </a:p>
         </p:txBody>
       </p:sp>
-      <p:pic>
-        <p:nvPicPr>
-          <p:cNvPr id="4" name="Picture 3" descr="02_footer.png"/>
-          <p:cNvPicPr>
-            <a:picLocks noChangeAspect="1"/>
-          </p:cNvPicPr>
-          <p:nvPr/>
-        </p:nvPicPr>
-        <p:blipFill>
-          <a:blip r:embed="rId2"/>
-          <a:stretch>
-            <a:fillRect/>
-          </a:stretch>
-        </p:blipFill>
-        <p:spPr>
-          <a:xfrm>
-            <a:off x="2436876" y="1874519"/>
-            <a:ext cx="7315200" cy="4572000"/>
-          </a:xfrm>
-          <a:prstGeom prst="rect">
-            <a:avLst/>
-          </a:prstGeom>
-        </p:spPr>
-      </p:pic>
       <p:sp>
         <p:nvSpPr>
           <p:cNvPr id="5" name="Rectangle 4"/>
@@ -3618,7 +3616,7 @@
           </a:fontRef>
         </p:style>
         <p:txBody>
-          <a:bodyPr rtlCol="0" anchor="ctr" lIns="0" tIns="0" bIns="0" rIns="0"/>
+          <a:bodyPr lIns="0" tIns="0" rIns="0" bIns="0" rtlCol="0" anchor="ctr"/>
           <a:lstStyle/>
           <a:p>
             <a:pPr algn="ctr"/>
@@ -3706,7 +3704,7 @@
           </a:fontRef>
         </p:style>
         <p:txBody>
-          <a:bodyPr rtlCol="0" anchor="ctr" lIns="0" tIns="0" bIns="0" rIns="0"/>
+          <a:bodyPr lIns="0" tIns="0" rIns="0" bIns="0" rtlCol="0" anchor="ctr"/>
           <a:lstStyle/>
           <a:p>
             <a:pPr algn="ctr"/>
@@ -3756,6 +3754,37 @@
           </a:p>
         </p:txBody>
       </p:sp>
+      <p:pic>
+        <p:nvPicPr>
+          <p:cNvPr id="9" name="그림 8">
+            <a:extLst>
+              <a:ext uri="{FF2B5EF4-FFF2-40B4-BE49-F238E27FC236}">
+                <a16:creationId xmlns:a16="http://schemas.microsoft.com/office/drawing/2014/main" id="{8A6F00F1-ADB0-A7E0-6099-A24C2E7A68EB}"/>
+              </a:ext>
+            </a:extLst>
+          </p:cNvPr>
+          <p:cNvPicPr>
+            <a:picLocks noChangeAspect="1"/>
+          </p:cNvPicPr>
+          <p:nvPr/>
+        </p:nvPicPr>
+        <p:blipFill>
+          <a:blip r:embed="rId2"/>
+          <a:srcRect l="-43" r="16610"/>
+          <a:stretch>
+            <a:fillRect/>
+          </a:stretch>
+        </p:blipFill>
+        <p:spPr>
+          <a:xfrm>
+            <a:off x="5323115" y="1810053"/>
+            <a:ext cx="6484711" cy="5047947"/>
+          </a:xfrm>
+          <a:prstGeom prst="rect">
+            <a:avLst/>
+          </a:prstGeom>
+        </p:spPr>
+      </p:pic>
     </p:spTree>
   </p:cSld>
   <p:clrMapOvr>
@@ -3765,7 +3794,7 @@
 </file>
 
 <file path=ppt/slides/slide4.xml><?xml version="1.0" encoding="utf-8"?>
-<p:sld xmlns:a="http://schemas.openxmlformats.org/drawingml/2006/main" xmlns:p="http://schemas.openxmlformats.org/presentationml/2006/main" xmlns:r="http://schemas.openxmlformats.org/officeDocument/2006/relationships">
+<p:sld xmlns:a="http://schemas.openxmlformats.org/drawingml/2006/main" xmlns:r="http://schemas.openxmlformats.org/officeDocument/2006/relationships" xmlns:p="http://schemas.openxmlformats.org/presentationml/2006/main">
   <p:cSld>
     <p:spTree>
       <p:nvGrpSpPr>
@@ -3773,7 +3802,14 @@
         <p:cNvGrpSpPr/>
         <p:nvPr/>
       </p:nvGrpSpPr>
-      <p:grpSpPr/>
+      <p:grpSpPr>
+        <a:xfrm>
+          <a:off x="0" y="0"/>
+          <a:ext cx="0" cy="0"/>
+          <a:chOff x="0" y="0"/>
+          <a:chExt cx="0" cy="0"/>
+        </a:xfrm>
+      </p:grpSpPr>
       <p:sp>
         <p:nvSpPr>
           <p:cNvPr id="2" name="TextBox 1"/>
@@ -3863,15 +3899,12 @@
             </a:r>
           </a:p>
           <a:p>
-            <a:r>
-              <a:rPr sz="1500">
-                <a:solidFill>
-                  <a:srgbClr val="222222"/>
-                </a:solidFill>
-                <a:latin typeface="Apple SD Gothic Neo"/>
-              </a:rPr>
-              <a:t/>
-            </a:r>
+            <a:endParaRPr sz="1500">
+              <a:solidFill>
+                <a:srgbClr val="222222"/>
+              </a:solidFill>
+              <a:latin typeface="Apple SD Gothic Neo"/>
+            </a:endParaRPr>
           </a:p>
           <a:p>
             <a:r>
@@ -3917,7 +3950,7 @@
 </file>
 
 <file path=ppt/slides/slide5.xml><?xml version="1.0" encoding="utf-8"?>
-<p:sld xmlns:a="http://schemas.openxmlformats.org/drawingml/2006/main" xmlns:p="http://schemas.openxmlformats.org/presentationml/2006/main" xmlns:r="http://schemas.openxmlformats.org/officeDocument/2006/relationships">
+<p:sld xmlns:a="http://schemas.openxmlformats.org/drawingml/2006/main" xmlns:r="http://schemas.openxmlformats.org/officeDocument/2006/relationships" xmlns:p="http://schemas.openxmlformats.org/presentationml/2006/main">
   <p:cSld>
     <p:spTree>
       <p:nvGrpSpPr>
@@ -3925,7 +3958,14 @@
         <p:cNvGrpSpPr/>
         <p:nvPr/>
       </p:nvGrpSpPr>
-      <p:grpSpPr/>
+      <p:grpSpPr>
+        <a:xfrm>
+          <a:off x="0" y="0"/>
+          <a:ext cx="0" cy="0"/>
+          <a:chOff x="0" y="0"/>
+          <a:chExt cx="0" cy="0"/>
+        </a:xfrm>
+      </p:grpSpPr>
       <p:sp>
         <p:nvSpPr>
           <p:cNvPr id="2" name="TextBox 1"/>
@@ -4010,7 +4050,7 @@
           </a:fontRef>
         </p:style>
         <p:txBody>
-          <a:bodyPr rtlCol="0" anchor="ctr" lIns="137160"/>
+          <a:bodyPr lIns="137160" rtlCol="0" anchor="ctr"/>
           <a:lstStyle/>
           <a:p>
             <a:pPr algn="l"/>
@@ -4042,7 +4082,7 @@
         </p:blipFill>
         <p:spPr>
           <a:xfrm>
-            <a:off x="4463624" y="1874519"/>
+            <a:off x="6488367" y="1841862"/>
             <a:ext cx="3261704" cy="4206240"/>
           </a:xfrm>
           <a:prstGeom prst="rect">
@@ -4058,7 +4098,7 @@
         </p:nvSpPr>
         <p:spPr>
           <a:xfrm>
-            <a:off x="457200" y="6035040"/>
+            <a:off x="457200" y="5969724"/>
             <a:ext cx="11247120" cy="548640"/>
           </a:xfrm>
           <a:prstGeom prst="rect">
@@ -4073,35 +4113,476 @@
           <a:lstStyle/>
           <a:p>
             <a:r>
-              <a:rPr sz="1100">
-                <a:solidFill>
-                  <a:srgbClr val="222222"/>
-                </a:solidFill>
-                <a:latin typeface="Apple SD Gothic Neo"/>
-              </a:rPr>
-              <a:t>ㆍ지정일 운세 9,900원 · 월별 운세 19,900원 · 신년 운세 29,900원 · 인생 총운 49,900원</a:t>
-            </a:r>
-          </a:p>
-          <a:p>
-            <a:r>
-              <a:rPr sz="1100">
-                <a:solidFill>
-                  <a:srgbClr val="222222"/>
-                </a:solidFill>
-                <a:latin typeface="Apple SD Gothic Neo"/>
-              </a:rPr>
-              <a:t>ㆍ모든 상품 500만원 미만 (카드사 고액상품 심사 제한 기준 부합)</a:t>
-            </a:r>
-          </a:p>
-          <a:p>
-            <a:r>
-              <a:rPr sz="1100">
-                <a:solidFill>
-                  <a:srgbClr val="222222"/>
-                </a:solidFill>
-                <a:latin typeface="Apple SD Gothic Neo"/>
-              </a:rPr>
-              <a:t>ㆍ단건 결제 — 사주 풀이 디지털 콘텐츠 (소프트웨어형 서비스 제공)</a:t>
+              <a:rPr sz="1100" dirty="0" err="1">
+                <a:solidFill>
+                  <a:srgbClr val="222222"/>
+                </a:solidFill>
+                <a:latin typeface="Apple SD Gothic Neo"/>
+              </a:rPr>
+              <a:t>ㆍ지정일</a:t>
+            </a:r>
+            <a:r>
+              <a:rPr sz="1100" dirty="0">
+                <a:solidFill>
+                  <a:srgbClr val="222222"/>
+                </a:solidFill>
+                <a:latin typeface="Apple SD Gothic Neo"/>
+              </a:rPr>
+              <a:t> </a:t>
+            </a:r>
+            <a:r>
+              <a:rPr sz="1100" dirty="0" err="1">
+                <a:solidFill>
+                  <a:srgbClr val="222222"/>
+                </a:solidFill>
+                <a:latin typeface="Apple SD Gothic Neo"/>
+              </a:rPr>
+              <a:t>운세</a:t>
+            </a:r>
+            <a:r>
+              <a:rPr sz="1100" dirty="0">
+                <a:solidFill>
+                  <a:srgbClr val="222222"/>
+                </a:solidFill>
+                <a:latin typeface="Apple SD Gothic Neo"/>
+              </a:rPr>
+              <a:t> 9,900원 · </a:t>
+            </a:r>
+            <a:r>
+              <a:rPr sz="1100" dirty="0" err="1">
+                <a:solidFill>
+                  <a:srgbClr val="222222"/>
+                </a:solidFill>
+                <a:latin typeface="Apple SD Gothic Neo"/>
+              </a:rPr>
+              <a:t>월별</a:t>
+            </a:r>
+            <a:r>
+              <a:rPr sz="1100" dirty="0">
+                <a:solidFill>
+                  <a:srgbClr val="222222"/>
+                </a:solidFill>
+                <a:latin typeface="Apple SD Gothic Neo"/>
+              </a:rPr>
+              <a:t> </a:t>
+            </a:r>
+            <a:r>
+              <a:rPr sz="1100" dirty="0" err="1">
+                <a:solidFill>
+                  <a:srgbClr val="222222"/>
+                </a:solidFill>
+                <a:latin typeface="Apple SD Gothic Neo"/>
+              </a:rPr>
+              <a:t>운세</a:t>
+            </a:r>
+            <a:r>
+              <a:rPr sz="1100" dirty="0">
+                <a:solidFill>
+                  <a:srgbClr val="222222"/>
+                </a:solidFill>
+                <a:latin typeface="Apple SD Gothic Neo"/>
+              </a:rPr>
+              <a:t> 19,900원 · </a:t>
+            </a:r>
+            <a:r>
+              <a:rPr sz="1100" dirty="0" err="1">
+                <a:solidFill>
+                  <a:srgbClr val="222222"/>
+                </a:solidFill>
+                <a:latin typeface="Apple SD Gothic Neo"/>
+              </a:rPr>
+              <a:t>신년</a:t>
+            </a:r>
+            <a:r>
+              <a:rPr sz="1100" dirty="0">
+                <a:solidFill>
+                  <a:srgbClr val="222222"/>
+                </a:solidFill>
+                <a:latin typeface="Apple SD Gothic Neo"/>
+              </a:rPr>
+              <a:t> </a:t>
+            </a:r>
+            <a:r>
+              <a:rPr sz="1100" dirty="0" err="1">
+                <a:solidFill>
+                  <a:srgbClr val="222222"/>
+                </a:solidFill>
+                <a:latin typeface="Apple SD Gothic Neo"/>
+              </a:rPr>
+              <a:t>운세</a:t>
+            </a:r>
+            <a:r>
+              <a:rPr sz="1100" dirty="0">
+                <a:solidFill>
+                  <a:srgbClr val="222222"/>
+                </a:solidFill>
+                <a:latin typeface="Apple SD Gothic Neo"/>
+              </a:rPr>
+              <a:t> 29,900원 · </a:t>
+            </a:r>
+            <a:r>
+              <a:rPr sz="1100" dirty="0" err="1">
+                <a:solidFill>
+                  <a:srgbClr val="222222"/>
+                </a:solidFill>
+                <a:latin typeface="Apple SD Gothic Neo"/>
+              </a:rPr>
+              <a:t>인생</a:t>
+            </a:r>
+            <a:r>
+              <a:rPr sz="1100" dirty="0">
+                <a:solidFill>
+                  <a:srgbClr val="222222"/>
+                </a:solidFill>
+                <a:latin typeface="Apple SD Gothic Neo"/>
+              </a:rPr>
+              <a:t> </a:t>
+            </a:r>
+            <a:r>
+              <a:rPr sz="1100" dirty="0" err="1">
+                <a:solidFill>
+                  <a:srgbClr val="222222"/>
+                </a:solidFill>
+                <a:latin typeface="Apple SD Gothic Neo"/>
+              </a:rPr>
+              <a:t>총운</a:t>
+            </a:r>
+            <a:r>
+              <a:rPr sz="1100" dirty="0">
+                <a:solidFill>
+                  <a:srgbClr val="222222"/>
+                </a:solidFill>
+                <a:latin typeface="Apple SD Gothic Neo"/>
+              </a:rPr>
+              <a:t> 49,900원</a:t>
+            </a:r>
+          </a:p>
+          <a:p>
+            <a:r>
+              <a:rPr sz="1100" dirty="0" err="1">
+                <a:solidFill>
+                  <a:srgbClr val="222222"/>
+                </a:solidFill>
+                <a:latin typeface="Apple SD Gothic Neo"/>
+              </a:rPr>
+              <a:t>ㆍ모든</a:t>
+            </a:r>
+            <a:r>
+              <a:rPr sz="1100" dirty="0">
+                <a:solidFill>
+                  <a:srgbClr val="222222"/>
+                </a:solidFill>
+                <a:latin typeface="Apple SD Gothic Neo"/>
+              </a:rPr>
+              <a:t> </a:t>
+            </a:r>
+            <a:r>
+              <a:rPr sz="1100" dirty="0" err="1">
+                <a:solidFill>
+                  <a:srgbClr val="222222"/>
+                </a:solidFill>
+                <a:latin typeface="Apple SD Gothic Neo"/>
+              </a:rPr>
+              <a:t>상품</a:t>
+            </a:r>
+            <a:r>
+              <a:rPr sz="1100" dirty="0">
+                <a:solidFill>
+                  <a:srgbClr val="222222"/>
+                </a:solidFill>
+                <a:latin typeface="Apple SD Gothic Neo"/>
+              </a:rPr>
+              <a:t> 500만원 </a:t>
+            </a:r>
+            <a:r>
+              <a:rPr sz="1100" dirty="0" err="1">
+                <a:solidFill>
+                  <a:srgbClr val="222222"/>
+                </a:solidFill>
+                <a:latin typeface="Apple SD Gothic Neo"/>
+              </a:rPr>
+              <a:t>미만</a:t>
+            </a:r>
+            <a:r>
+              <a:rPr sz="1100" dirty="0">
+                <a:solidFill>
+                  <a:srgbClr val="222222"/>
+                </a:solidFill>
+                <a:latin typeface="Apple SD Gothic Neo"/>
+              </a:rPr>
+              <a:t> (</a:t>
+            </a:r>
+            <a:r>
+              <a:rPr sz="1100" dirty="0" err="1">
+                <a:solidFill>
+                  <a:srgbClr val="222222"/>
+                </a:solidFill>
+                <a:latin typeface="Apple SD Gothic Neo"/>
+              </a:rPr>
+              <a:t>카드사</a:t>
+            </a:r>
+            <a:r>
+              <a:rPr sz="1100" dirty="0">
+                <a:solidFill>
+                  <a:srgbClr val="222222"/>
+                </a:solidFill>
+                <a:latin typeface="Apple SD Gothic Neo"/>
+              </a:rPr>
+              <a:t> </a:t>
+            </a:r>
+            <a:r>
+              <a:rPr sz="1100" dirty="0" err="1">
+                <a:solidFill>
+                  <a:srgbClr val="222222"/>
+                </a:solidFill>
+                <a:latin typeface="Apple SD Gothic Neo"/>
+              </a:rPr>
+              <a:t>고액상품</a:t>
+            </a:r>
+            <a:r>
+              <a:rPr sz="1100" dirty="0">
+                <a:solidFill>
+                  <a:srgbClr val="222222"/>
+                </a:solidFill>
+                <a:latin typeface="Apple SD Gothic Neo"/>
+              </a:rPr>
+              <a:t> </a:t>
+            </a:r>
+            <a:r>
+              <a:rPr sz="1100" dirty="0" err="1">
+                <a:solidFill>
+                  <a:srgbClr val="222222"/>
+                </a:solidFill>
+                <a:latin typeface="Apple SD Gothic Neo"/>
+              </a:rPr>
+              <a:t>심사</a:t>
+            </a:r>
+            <a:r>
+              <a:rPr sz="1100" dirty="0">
+                <a:solidFill>
+                  <a:srgbClr val="222222"/>
+                </a:solidFill>
+                <a:latin typeface="Apple SD Gothic Neo"/>
+              </a:rPr>
+              <a:t> </a:t>
+            </a:r>
+            <a:r>
+              <a:rPr sz="1100" dirty="0" err="1">
+                <a:solidFill>
+                  <a:srgbClr val="222222"/>
+                </a:solidFill>
+                <a:latin typeface="Apple SD Gothic Neo"/>
+              </a:rPr>
+              <a:t>제한</a:t>
+            </a:r>
+            <a:r>
+              <a:rPr sz="1100" dirty="0">
+                <a:solidFill>
+                  <a:srgbClr val="222222"/>
+                </a:solidFill>
+                <a:latin typeface="Apple SD Gothic Neo"/>
+              </a:rPr>
+              <a:t> </a:t>
+            </a:r>
+            <a:r>
+              <a:rPr sz="1100" dirty="0" err="1">
+                <a:solidFill>
+                  <a:srgbClr val="222222"/>
+                </a:solidFill>
+                <a:latin typeface="Apple SD Gothic Neo"/>
+              </a:rPr>
+              <a:t>기준</a:t>
+            </a:r>
+            <a:r>
+              <a:rPr sz="1100" dirty="0">
+                <a:solidFill>
+                  <a:srgbClr val="222222"/>
+                </a:solidFill>
+                <a:latin typeface="Apple SD Gothic Neo"/>
+              </a:rPr>
+              <a:t> </a:t>
+            </a:r>
+            <a:r>
+              <a:rPr sz="1100" dirty="0" err="1">
+                <a:solidFill>
+                  <a:srgbClr val="222222"/>
+                </a:solidFill>
+                <a:latin typeface="Apple SD Gothic Neo"/>
+              </a:rPr>
+              <a:t>부합</a:t>
+            </a:r>
+            <a:r>
+              <a:rPr sz="1100" dirty="0">
+                <a:solidFill>
+                  <a:srgbClr val="222222"/>
+                </a:solidFill>
+                <a:latin typeface="Apple SD Gothic Neo"/>
+              </a:rPr>
+              <a:t>)</a:t>
+            </a:r>
+          </a:p>
+          <a:p>
+            <a:r>
+              <a:rPr sz="1100" dirty="0" err="1">
+                <a:solidFill>
+                  <a:srgbClr val="222222"/>
+                </a:solidFill>
+                <a:latin typeface="Apple SD Gothic Neo"/>
+              </a:rPr>
+              <a:t>ㆍ단건</a:t>
+            </a:r>
+            <a:r>
+              <a:rPr sz="1100" dirty="0">
+                <a:solidFill>
+                  <a:srgbClr val="222222"/>
+                </a:solidFill>
+                <a:latin typeface="Apple SD Gothic Neo"/>
+              </a:rPr>
+              <a:t> </a:t>
+            </a:r>
+            <a:r>
+              <a:rPr sz="1100" dirty="0" err="1">
+                <a:solidFill>
+                  <a:srgbClr val="222222"/>
+                </a:solidFill>
+                <a:latin typeface="Apple SD Gothic Neo"/>
+              </a:rPr>
+              <a:t>결제</a:t>
+            </a:r>
+            <a:r>
+              <a:rPr sz="1100" dirty="0">
+                <a:solidFill>
+                  <a:srgbClr val="222222"/>
+                </a:solidFill>
+                <a:latin typeface="Apple SD Gothic Neo"/>
+              </a:rPr>
+              <a:t> — </a:t>
+            </a:r>
+            <a:r>
+              <a:rPr sz="1100" dirty="0" err="1">
+                <a:solidFill>
+                  <a:srgbClr val="222222"/>
+                </a:solidFill>
+                <a:latin typeface="Apple SD Gothic Neo"/>
+              </a:rPr>
+              <a:t>사주</a:t>
+            </a:r>
+            <a:r>
+              <a:rPr sz="1100" dirty="0">
+                <a:solidFill>
+                  <a:srgbClr val="222222"/>
+                </a:solidFill>
+                <a:latin typeface="Apple SD Gothic Neo"/>
+              </a:rPr>
+              <a:t> </a:t>
+            </a:r>
+            <a:r>
+              <a:rPr sz="1100" dirty="0" err="1">
+                <a:solidFill>
+                  <a:srgbClr val="222222"/>
+                </a:solidFill>
+                <a:latin typeface="Apple SD Gothic Neo"/>
+              </a:rPr>
+              <a:t>풀이</a:t>
+            </a:r>
+            <a:r>
+              <a:rPr sz="1100" dirty="0">
+                <a:solidFill>
+                  <a:srgbClr val="222222"/>
+                </a:solidFill>
+                <a:latin typeface="Apple SD Gothic Neo"/>
+              </a:rPr>
+              <a:t> </a:t>
+            </a:r>
+            <a:r>
+              <a:rPr sz="1100" dirty="0" err="1">
+                <a:solidFill>
+                  <a:srgbClr val="222222"/>
+                </a:solidFill>
+                <a:latin typeface="Apple SD Gothic Neo"/>
+              </a:rPr>
+              <a:t>디지털</a:t>
+            </a:r>
+            <a:r>
+              <a:rPr sz="1100" dirty="0">
+                <a:solidFill>
+                  <a:srgbClr val="222222"/>
+                </a:solidFill>
+                <a:latin typeface="Apple SD Gothic Neo"/>
+              </a:rPr>
+              <a:t> </a:t>
+            </a:r>
+            <a:r>
+              <a:rPr sz="1100" dirty="0" err="1">
+                <a:solidFill>
+                  <a:srgbClr val="222222"/>
+                </a:solidFill>
+                <a:latin typeface="Apple SD Gothic Neo"/>
+              </a:rPr>
+              <a:t>콘텐츠</a:t>
+            </a:r>
+            <a:r>
+              <a:rPr sz="1100" dirty="0">
+                <a:solidFill>
+                  <a:srgbClr val="222222"/>
+                </a:solidFill>
+                <a:latin typeface="Apple SD Gothic Neo"/>
+              </a:rPr>
+              <a:t> (</a:t>
+            </a:r>
+            <a:r>
+              <a:rPr sz="1100" dirty="0" err="1">
+                <a:solidFill>
+                  <a:srgbClr val="222222"/>
+                </a:solidFill>
+                <a:latin typeface="Apple SD Gothic Neo"/>
+              </a:rPr>
+              <a:t>소프트웨어형</a:t>
+            </a:r>
+            <a:r>
+              <a:rPr sz="1100" dirty="0">
+                <a:solidFill>
+                  <a:srgbClr val="222222"/>
+                </a:solidFill>
+                <a:latin typeface="Apple SD Gothic Neo"/>
+              </a:rPr>
+              <a:t> </a:t>
+            </a:r>
+            <a:r>
+              <a:rPr sz="1100" dirty="0" err="1">
+                <a:solidFill>
+                  <a:srgbClr val="222222"/>
+                </a:solidFill>
+                <a:latin typeface="Apple SD Gothic Neo"/>
+              </a:rPr>
+              <a:t>서비스</a:t>
+            </a:r>
+            <a:r>
+              <a:rPr sz="1100" dirty="0">
+                <a:solidFill>
+                  <a:srgbClr val="222222"/>
+                </a:solidFill>
+                <a:latin typeface="Apple SD Gothic Neo"/>
+              </a:rPr>
+              <a:t> </a:t>
+            </a:r>
+            <a:r>
+              <a:rPr sz="1100" dirty="0" err="1">
+                <a:solidFill>
+                  <a:srgbClr val="222222"/>
+                </a:solidFill>
+                <a:latin typeface="Apple SD Gothic Neo"/>
+              </a:rPr>
+              <a:t>제공</a:t>
+            </a:r>
+            <a:r>
+              <a:rPr sz="1100" dirty="0">
+                <a:solidFill>
+                  <a:srgbClr val="222222"/>
+                </a:solidFill>
+                <a:latin typeface="Apple SD Gothic Neo"/>
+              </a:rPr>
+              <a:t>)</a:t>
             </a:r>
           </a:p>
         </p:txBody>
@@ -4144,7 +4625,7 @@
           </a:fontRef>
         </p:style>
         <p:txBody>
-          <a:bodyPr rtlCol="0" anchor="ctr" lIns="0" tIns="0" bIns="0" rIns="0"/>
+          <a:bodyPr lIns="0" tIns="0" rIns="0" bIns="0" rtlCol="0" anchor="ctr"/>
           <a:lstStyle/>
           <a:p>
             <a:pPr algn="ctr"/>
@@ -4203,7 +4684,7 @@
 </file>
 
 <file path=ppt/slides/slide6.xml><?xml version="1.0" encoding="utf-8"?>
-<p:sld xmlns:a="http://schemas.openxmlformats.org/drawingml/2006/main" xmlns:p="http://schemas.openxmlformats.org/presentationml/2006/main" xmlns:r="http://schemas.openxmlformats.org/officeDocument/2006/relationships">
+<p:sld xmlns:a="http://schemas.openxmlformats.org/drawingml/2006/main" xmlns:r="http://schemas.openxmlformats.org/officeDocument/2006/relationships" xmlns:p="http://schemas.openxmlformats.org/presentationml/2006/main">
   <p:cSld>
     <p:spTree>
       <p:nvGrpSpPr>
@@ -4211,7 +4692,14 @@
         <p:cNvGrpSpPr/>
         <p:nvPr/>
       </p:nvGrpSpPr>
-      <p:grpSpPr/>
+      <p:grpSpPr>
+        <a:xfrm>
+          <a:off x="0" y="0"/>
+          <a:ext cx="0" cy="0"/>
+          <a:chOff x="0" y="0"/>
+          <a:chExt cx="0" cy="0"/>
+        </a:xfrm>
+      </p:grpSpPr>
       <p:sp>
         <p:nvSpPr>
           <p:cNvPr id="2" name="TextBox 1"/>
@@ -4296,7 +4784,7 @@
           </a:fontRef>
         </p:style>
         <p:txBody>
-          <a:bodyPr rtlCol="0" anchor="ctr" lIns="137160"/>
+          <a:bodyPr lIns="137160" rtlCol="0" anchor="ctr"/>
           <a:lstStyle/>
           <a:p>
             <a:pPr algn="l"/>
@@ -4328,7 +4816,7 @@
         </p:blipFill>
         <p:spPr>
           <a:xfrm>
-            <a:off x="4976263" y="1874519"/>
+            <a:off x="3397835" y="1828800"/>
             <a:ext cx="2236426" cy="4754880"/>
           </a:xfrm>
           <a:prstGeom prst="rect">
@@ -4493,7 +4981,7 @@
 </file>
 
 <file path=ppt/slides/slide7.xml><?xml version="1.0" encoding="utf-8"?>
-<p:sld xmlns:a="http://schemas.openxmlformats.org/drawingml/2006/main" xmlns:p="http://schemas.openxmlformats.org/presentationml/2006/main" xmlns:r="http://schemas.openxmlformats.org/officeDocument/2006/relationships">
+<p:sld xmlns:a="http://schemas.openxmlformats.org/drawingml/2006/main" xmlns:r="http://schemas.openxmlformats.org/officeDocument/2006/relationships" xmlns:p="http://schemas.openxmlformats.org/presentationml/2006/main">
   <p:cSld>
     <p:spTree>
       <p:nvGrpSpPr>
@@ -4501,7 +4989,14 @@
         <p:cNvGrpSpPr/>
         <p:nvPr/>
       </p:nvGrpSpPr>
-      <p:grpSpPr/>
+      <p:grpSpPr>
+        <a:xfrm>
+          <a:off x="0" y="0"/>
+          <a:ext cx="0" cy="0"/>
+          <a:chOff x="0" y="0"/>
+          <a:chExt cx="0" cy="0"/>
+        </a:xfrm>
+      </p:grpSpPr>
       <p:sp>
         <p:nvSpPr>
           <p:cNvPr id="2" name="TextBox 1"/>
@@ -4586,7 +5081,7 @@
           </a:fontRef>
         </p:style>
         <p:txBody>
-          <a:bodyPr rtlCol="0" anchor="ctr" lIns="137160"/>
+          <a:bodyPr lIns="137160" rtlCol="0" anchor="ctr"/>
           <a:lstStyle/>
           <a:p>
             <a:pPr algn="l"/>
@@ -4618,8 +5113,8 @@
         </p:blipFill>
         <p:spPr>
           <a:xfrm>
-            <a:off x="548640" y="1874519"/>
-            <a:ext cx="2941052" cy="4572000"/>
+            <a:off x="1365069" y="1874519"/>
+            <a:ext cx="2941052" cy="3749042"/>
           </a:xfrm>
           <a:prstGeom prst="rect">
             <a:avLst/>
@@ -4678,7 +5173,7 @@
         <p:spPr>
           <a:xfrm>
             <a:off x="6492240" y="1874519"/>
-            <a:ext cx="2941052" cy="4572000"/>
+            <a:ext cx="2941052" cy="3749042"/>
           </a:xfrm>
           <a:prstGeom prst="rect">
             <a:avLst/>
@@ -4693,7 +5188,7 @@
         </p:nvSpPr>
         <p:spPr>
           <a:xfrm>
-            <a:off x="6492240" y="6492239"/>
+            <a:off x="5669280" y="6400799"/>
             <a:ext cx="5120640" cy="365760"/>
           </a:xfrm>
           <a:prstGeom prst="rect">
@@ -4709,14 +5204,119 @@
           <a:p>
             <a:pPr algn="ctr"/>
             <a:r>
-              <a:rPr sz="1200">
+              <a:rPr sz="1200" dirty="0">
                 <a:solidFill>
                   <a:srgbClr val="555555"/>
                 </a:solidFill>
                 <a:latin typeface="Apple SD Gothic Neo"/>
               </a:rPr>
-              <a:t>[2단계] 4종 동의 완료 → 「카카오페이로 결제하기」 버튼 활성</a:t>
-            </a:r>
+              <a:t>[2단계] 4종 </a:t>
+            </a:r>
+            <a:r>
+              <a:rPr sz="1200" dirty="0" err="1">
+                <a:solidFill>
+                  <a:srgbClr val="555555"/>
+                </a:solidFill>
+                <a:latin typeface="Apple SD Gothic Neo"/>
+              </a:rPr>
+              <a:t>동의</a:t>
+            </a:r>
+            <a:r>
+              <a:rPr sz="1200" dirty="0">
+                <a:solidFill>
+                  <a:srgbClr val="555555"/>
+                </a:solidFill>
+                <a:latin typeface="Apple SD Gothic Neo"/>
+              </a:rPr>
+              <a:t> </a:t>
+            </a:r>
+            <a:r>
+              <a:rPr sz="1200" dirty="0" err="1">
+                <a:solidFill>
+                  <a:srgbClr val="555555"/>
+                </a:solidFill>
+                <a:latin typeface="Apple SD Gothic Neo"/>
+              </a:rPr>
+              <a:t>완료</a:t>
+            </a:r>
+            <a:r>
+              <a:rPr sz="1200" dirty="0">
+                <a:solidFill>
+                  <a:srgbClr val="555555"/>
+                </a:solidFill>
+                <a:latin typeface="Apple SD Gothic Neo"/>
+              </a:rPr>
+              <a:t> → 「</a:t>
+            </a:r>
+            <a:r>
+              <a:rPr sz="1200" dirty="0" err="1">
+                <a:solidFill>
+                  <a:srgbClr val="555555"/>
+                </a:solidFill>
+                <a:latin typeface="Apple SD Gothic Neo"/>
+              </a:rPr>
+              <a:t>카카오페이로</a:t>
+            </a:r>
+            <a:r>
+              <a:rPr sz="1200" dirty="0">
+                <a:solidFill>
+                  <a:srgbClr val="555555"/>
+                </a:solidFill>
+                <a:latin typeface="Apple SD Gothic Neo"/>
+              </a:rPr>
+              <a:t> </a:t>
+            </a:r>
+            <a:r>
+              <a:rPr sz="1200" dirty="0" err="1">
+                <a:solidFill>
+                  <a:srgbClr val="555555"/>
+                </a:solidFill>
+                <a:latin typeface="Apple SD Gothic Neo"/>
+              </a:rPr>
+              <a:t>결제하기</a:t>
+            </a:r>
+            <a:r>
+              <a:rPr sz="1200" dirty="0">
+                <a:solidFill>
+                  <a:srgbClr val="555555"/>
+                </a:solidFill>
+                <a:latin typeface="Apple SD Gothic Neo"/>
+              </a:rPr>
+              <a:t>」 </a:t>
+            </a:r>
+            <a:r>
+              <a:rPr sz="1200" dirty="0" err="1">
+                <a:solidFill>
+                  <a:srgbClr val="555555"/>
+                </a:solidFill>
+                <a:latin typeface="Apple SD Gothic Neo"/>
+              </a:rPr>
+              <a:t>버튼</a:t>
+            </a:r>
+            <a:r>
+              <a:rPr sz="1200" dirty="0">
+                <a:solidFill>
+                  <a:srgbClr val="555555"/>
+                </a:solidFill>
+                <a:latin typeface="Apple SD Gothic Neo"/>
+              </a:rPr>
+              <a:t> </a:t>
+            </a:r>
+            <a:r>
+              <a:rPr sz="1200" dirty="0" err="1">
+                <a:solidFill>
+                  <a:srgbClr val="555555"/>
+                </a:solidFill>
+                <a:latin typeface="Apple SD Gothic Neo"/>
+              </a:rPr>
+              <a:t>활성</a:t>
+            </a:r>
+            <a:endParaRPr sz="1200" dirty="0">
+              <a:solidFill>
+                <a:srgbClr val="555555"/>
+              </a:solidFill>
+              <a:latin typeface="Apple SD Gothic Neo"/>
+            </a:endParaRPr>
           </a:p>
         </p:txBody>
       </p:sp>
@@ -4728,7 +5328,7 @@
         </p:nvSpPr>
         <p:spPr>
           <a:xfrm>
-            <a:off x="457200" y="6400800"/>
+            <a:off x="315687" y="5943599"/>
             <a:ext cx="11247120" cy="548640"/>
           </a:xfrm>
           <a:prstGeom prst="rect">
@@ -4743,25 +5343,508 @@
           <a:lstStyle/>
           <a:p>
             <a:r>
-              <a:rPr sz="1100">
-                <a:solidFill>
-                  <a:srgbClr val="222222"/>
-                </a:solidFill>
-                <a:latin typeface="Apple SD Gothic Neo"/>
-              </a:rPr>
-              <a:t>ㆍ「카카오페이로 결제하기」 버튼 클릭 시 토스페이먼츠 SDK가 카카오페이 결제창 호출 (운영 키 등록 후 실 결제 활성)</a:t>
-            </a:r>
-          </a:p>
-          <a:p>
-            <a:r>
-              <a:rPr sz="1100">
-                <a:solidFill>
-                  <a:srgbClr val="222222"/>
-                </a:solidFill>
-                <a:latin typeface="Apple SD Gothic Neo"/>
-              </a:rPr>
-              <a:t>ㆍ카드번호 등 결제 정보는 회사가 수집/보관하지 않으며, 토스페이먼츠가 직접 처리</a:t>
-            </a:r>
+              <a:rPr sz="1100" dirty="0" err="1">
+                <a:solidFill>
+                  <a:srgbClr val="222222"/>
+                </a:solidFill>
+                <a:latin typeface="Apple SD Gothic Neo"/>
+              </a:rPr>
+              <a:t>ㆍ「카카오페이로</a:t>
+            </a:r>
+            <a:r>
+              <a:rPr sz="1100" dirty="0">
+                <a:solidFill>
+                  <a:srgbClr val="222222"/>
+                </a:solidFill>
+                <a:latin typeface="Apple SD Gothic Neo"/>
+              </a:rPr>
+              <a:t> </a:t>
+            </a:r>
+            <a:r>
+              <a:rPr sz="1100" dirty="0" err="1">
+                <a:solidFill>
+                  <a:srgbClr val="222222"/>
+                </a:solidFill>
+                <a:latin typeface="Apple SD Gothic Neo"/>
+              </a:rPr>
+              <a:t>결제하기</a:t>
+            </a:r>
+            <a:r>
+              <a:rPr sz="1100" dirty="0">
+                <a:solidFill>
+                  <a:srgbClr val="222222"/>
+                </a:solidFill>
+                <a:latin typeface="Apple SD Gothic Neo"/>
+              </a:rPr>
+              <a:t>」 </a:t>
+            </a:r>
+            <a:r>
+              <a:rPr sz="1100" dirty="0" err="1">
+                <a:solidFill>
+                  <a:srgbClr val="222222"/>
+                </a:solidFill>
+                <a:latin typeface="Apple SD Gothic Neo"/>
+              </a:rPr>
+              <a:t>버튼</a:t>
+            </a:r>
+            <a:r>
+              <a:rPr sz="1100" dirty="0">
+                <a:solidFill>
+                  <a:srgbClr val="222222"/>
+                </a:solidFill>
+                <a:latin typeface="Apple SD Gothic Neo"/>
+              </a:rPr>
+              <a:t> </a:t>
+            </a:r>
+            <a:r>
+              <a:rPr sz="1100" dirty="0" err="1">
+                <a:solidFill>
+                  <a:srgbClr val="222222"/>
+                </a:solidFill>
+                <a:latin typeface="Apple SD Gothic Neo"/>
+              </a:rPr>
+              <a:t>클릭</a:t>
+            </a:r>
+            <a:r>
+              <a:rPr sz="1100" dirty="0">
+                <a:solidFill>
+                  <a:srgbClr val="222222"/>
+                </a:solidFill>
+                <a:latin typeface="Apple SD Gothic Neo"/>
+              </a:rPr>
+              <a:t> </a:t>
+            </a:r>
+            <a:r>
+              <a:rPr sz="1100" dirty="0" err="1">
+                <a:solidFill>
+                  <a:srgbClr val="222222"/>
+                </a:solidFill>
+                <a:latin typeface="Apple SD Gothic Neo"/>
+              </a:rPr>
+              <a:t>시</a:t>
+            </a:r>
+            <a:r>
+              <a:rPr sz="1100" dirty="0">
+                <a:solidFill>
+                  <a:srgbClr val="222222"/>
+                </a:solidFill>
+                <a:latin typeface="Apple SD Gothic Neo"/>
+              </a:rPr>
+              <a:t> </a:t>
+            </a:r>
+            <a:r>
+              <a:rPr sz="1100" dirty="0" err="1">
+                <a:solidFill>
+                  <a:srgbClr val="222222"/>
+                </a:solidFill>
+                <a:latin typeface="Apple SD Gothic Neo"/>
+              </a:rPr>
+              <a:t>토스페이먼츠</a:t>
+            </a:r>
+            <a:r>
+              <a:rPr sz="1100" dirty="0">
+                <a:solidFill>
+                  <a:srgbClr val="222222"/>
+                </a:solidFill>
+                <a:latin typeface="Apple SD Gothic Neo"/>
+              </a:rPr>
+              <a:t> </a:t>
+            </a:r>
+            <a:r>
+              <a:rPr sz="1100" dirty="0" err="1">
+                <a:solidFill>
+                  <a:srgbClr val="222222"/>
+                </a:solidFill>
+                <a:latin typeface="Apple SD Gothic Neo"/>
+              </a:rPr>
+              <a:t>SDK가</a:t>
+            </a:r>
+            <a:r>
+              <a:rPr sz="1100" dirty="0">
+                <a:solidFill>
+                  <a:srgbClr val="222222"/>
+                </a:solidFill>
+                <a:latin typeface="Apple SD Gothic Neo"/>
+              </a:rPr>
+              <a:t> </a:t>
+            </a:r>
+            <a:r>
+              <a:rPr sz="1100" dirty="0" err="1">
+                <a:solidFill>
+                  <a:srgbClr val="222222"/>
+                </a:solidFill>
+                <a:latin typeface="Apple SD Gothic Neo"/>
+              </a:rPr>
+              <a:t>카카오페이</a:t>
+            </a:r>
+            <a:r>
+              <a:rPr sz="1100" dirty="0">
+                <a:solidFill>
+                  <a:srgbClr val="222222"/>
+                </a:solidFill>
+                <a:latin typeface="Apple SD Gothic Neo"/>
+              </a:rPr>
+              <a:t> </a:t>
+            </a:r>
+            <a:r>
+              <a:rPr sz="1100" dirty="0" err="1">
+                <a:solidFill>
+                  <a:srgbClr val="222222"/>
+                </a:solidFill>
+                <a:latin typeface="Apple SD Gothic Neo"/>
+              </a:rPr>
+              <a:t>결제창</a:t>
+            </a:r>
+            <a:r>
+              <a:rPr sz="1100" dirty="0">
+                <a:solidFill>
+                  <a:srgbClr val="222222"/>
+                </a:solidFill>
+                <a:latin typeface="Apple SD Gothic Neo"/>
+              </a:rPr>
+              <a:t> </a:t>
+            </a:r>
+            <a:r>
+              <a:rPr sz="1100" dirty="0" err="1">
+                <a:solidFill>
+                  <a:srgbClr val="222222"/>
+                </a:solidFill>
+                <a:latin typeface="Apple SD Gothic Neo"/>
+              </a:rPr>
+              <a:t>호출</a:t>
+            </a:r>
+            <a:r>
+              <a:rPr sz="1100" dirty="0">
+                <a:solidFill>
+                  <a:srgbClr val="222222"/>
+                </a:solidFill>
+                <a:latin typeface="Apple SD Gothic Neo"/>
+              </a:rPr>
+              <a:t> (</a:t>
+            </a:r>
+            <a:r>
+              <a:rPr sz="1100" dirty="0" err="1">
+                <a:solidFill>
+                  <a:srgbClr val="222222"/>
+                </a:solidFill>
+                <a:latin typeface="Apple SD Gothic Neo"/>
+              </a:rPr>
+              <a:t>운영</a:t>
+            </a:r>
+            <a:r>
+              <a:rPr sz="1100" dirty="0">
+                <a:solidFill>
+                  <a:srgbClr val="222222"/>
+                </a:solidFill>
+                <a:latin typeface="Apple SD Gothic Neo"/>
+              </a:rPr>
+              <a:t> </a:t>
+            </a:r>
+            <a:r>
+              <a:rPr sz="1100" dirty="0" err="1">
+                <a:solidFill>
+                  <a:srgbClr val="222222"/>
+                </a:solidFill>
+                <a:latin typeface="Apple SD Gothic Neo"/>
+              </a:rPr>
+              <a:t>키</a:t>
+            </a:r>
+            <a:r>
+              <a:rPr sz="1100" dirty="0">
+                <a:solidFill>
+                  <a:srgbClr val="222222"/>
+                </a:solidFill>
+                <a:latin typeface="Apple SD Gothic Neo"/>
+              </a:rPr>
+              <a:t> </a:t>
+            </a:r>
+            <a:r>
+              <a:rPr sz="1100" dirty="0" err="1">
+                <a:solidFill>
+                  <a:srgbClr val="222222"/>
+                </a:solidFill>
+                <a:latin typeface="Apple SD Gothic Neo"/>
+              </a:rPr>
+              <a:t>등록</a:t>
+            </a:r>
+            <a:r>
+              <a:rPr sz="1100" dirty="0">
+                <a:solidFill>
+                  <a:srgbClr val="222222"/>
+                </a:solidFill>
+                <a:latin typeface="Apple SD Gothic Neo"/>
+              </a:rPr>
+              <a:t> </a:t>
+            </a:r>
+            <a:r>
+              <a:rPr sz="1100" dirty="0" err="1">
+                <a:solidFill>
+                  <a:srgbClr val="222222"/>
+                </a:solidFill>
+                <a:latin typeface="Apple SD Gothic Neo"/>
+              </a:rPr>
+              <a:t>후</a:t>
+            </a:r>
+            <a:r>
+              <a:rPr sz="1100" dirty="0">
+                <a:solidFill>
+                  <a:srgbClr val="222222"/>
+                </a:solidFill>
+                <a:latin typeface="Apple SD Gothic Neo"/>
+              </a:rPr>
+              <a:t> </a:t>
+            </a:r>
+            <a:r>
+              <a:rPr sz="1100" dirty="0" err="1">
+                <a:solidFill>
+                  <a:srgbClr val="222222"/>
+                </a:solidFill>
+                <a:latin typeface="Apple SD Gothic Neo"/>
+              </a:rPr>
+              <a:t>실</a:t>
+            </a:r>
+            <a:r>
+              <a:rPr sz="1100" dirty="0">
+                <a:solidFill>
+                  <a:srgbClr val="222222"/>
+                </a:solidFill>
+                <a:latin typeface="Apple SD Gothic Neo"/>
+              </a:rPr>
+              <a:t> </a:t>
+            </a:r>
+            <a:r>
+              <a:rPr sz="1100" dirty="0" err="1">
+                <a:solidFill>
+                  <a:srgbClr val="222222"/>
+                </a:solidFill>
+                <a:latin typeface="Apple SD Gothic Neo"/>
+              </a:rPr>
+              <a:t>결제</a:t>
+            </a:r>
+            <a:r>
+              <a:rPr sz="1100" dirty="0">
+                <a:solidFill>
+                  <a:srgbClr val="222222"/>
+                </a:solidFill>
+                <a:latin typeface="Apple SD Gothic Neo"/>
+              </a:rPr>
+              <a:t> </a:t>
+            </a:r>
+            <a:r>
+              <a:rPr sz="1100" dirty="0" err="1">
+                <a:solidFill>
+                  <a:srgbClr val="222222"/>
+                </a:solidFill>
+                <a:latin typeface="Apple SD Gothic Neo"/>
+              </a:rPr>
+              <a:t>활성</a:t>
+            </a:r>
+            <a:r>
+              <a:rPr sz="1100" dirty="0">
+                <a:solidFill>
+                  <a:srgbClr val="222222"/>
+                </a:solidFill>
+                <a:latin typeface="Apple SD Gothic Neo"/>
+              </a:rPr>
+              <a:t>)</a:t>
+            </a:r>
+          </a:p>
+          <a:p>
+            <a:r>
+              <a:rPr sz="1100" dirty="0" err="1">
+                <a:solidFill>
+                  <a:srgbClr val="222222"/>
+                </a:solidFill>
+                <a:latin typeface="Apple SD Gothic Neo"/>
+              </a:rPr>
+              <a:t>ㆍ카드번호</a:t>
+            </a:r>
+            <a:r>
+              <a:rPr sz="1100" dirty="0">
+                <a:solidFill>
+                  <a:srgbClr val="222222"/>
+                </a:solidFill>
+                <a:latin typeface="Apple SD Gothic Neo"/>
+              </a:rPr>
+              <a:t> </a:t>
+            </a:r>
+            <a:r>
+              <a:rPr sz="1100" dirty="0" err="1">
+                <a:solidFill>
+                  <a:srgbClr val="222222"/>
+                </a:solidFill>
+                <a:latin typeface="Apple SD Gothic Neo"/>
+              </a:rPr>
+              <a:t>등</a:t>
+            </a:r>
+            <a:r>
+              <a:rPr sz="1100" dirty="0">
+                <a:solidFill>
+                  <a:srgbClr val="222222"/>
+                </a:solidFill>
+                <a:latin typeface="Apple SD Gothic Neo"/>
+              </a:rPr>
+              <a:t> </a:t>
+            </a:r>
+            <a:r>
+              <a:rPr sz="1100" dirty="0" err="1">
+                <a:solidFill>
+                  <a:srgbClr val="222222"/>
+                </a:solidFill>
+                <a:latin typeface="Apple SD Gothic Neo"/>
+              </a:rPr>
+              <a:t>결제</a:t>
+            </a:r>
+            <a:r>
+              <a:rPr sz="1100" dirty="0">
+                <a:solidFill>
+                  <a:srgbClr val="222222"/>
+                </a:solidFill>
+                <a:latin typeface="Apple SD Gothic Neo"/>
+              </a:rPr>
+              <a:t> </a:t>
+            </a:r>
+            <a:r>
+              <a:rPr sz="1100" dirty="0" err="1">
+                <a:solidFill>
+                  <a:srgbClr val="222222"/>
+                </a:solidFill>
+                <a:latin typeface="Apple SD Gothic Neo"/>
+              </a:rPr>
+              <a:t>정보는</a:t>
+            </a:r>
+            <a:r>
+              <a:rPr sz="1100" dirty="0">
+                <a:solidFill>
+                  <a:srgbClr val="222222"/>
+                </a:solidFill>
+                <a:latin typeface="Apple SD Gothic Neo"/>
+              </a:rPr>
+              <a:t> </a:t>
+            </a:r>
+            <a:r>
+              <a:rPr sz="1100" dirty="0" err="1">
+                <a:solidFill>
+                  <a:srgbClr val="222222"/>
+                </a:solidFill>
+                <a:latin typeface="Apple SD Gothic Neo"/>
+              </a:rPr>
+              <a:t>회사가</a:t>
+            </a:r>
+            <a:r>
+              <a:rPr sz="1100" dirty="0">
+                <a:solidFill>
+                  <a:srgbClr val="222222"/>
+                </a:solidFill>
+                <a:latin typeface="Apple SD Gothic Neo"/>
+              </a:rPr>
+              <a:t> </a:t>
+            </a:r>
+            <a:r>
+              <a:rPr sz="1100" dirty="0" err="1">
+                <a:solidFill>
+                  <a:srgbClr val="222222"/>
+                </a:solidFill>
+                <a:latin typeface="Apple SD Gothic Neo"/>
+              </a:rPr>
+              <a:t>수집</a:t>
+            </a:r>
+            <a:r>
+              <a:rPr sz="1100" dirty="0">
+                <a:solidFill>
+                  <a:srgbClr val="222222"/>
+                </a:solidFill>
+                <a:latin typeface="Apple SD Gothic Neo"/>
+              </a:rPr>
+              <a:t>/</a:t>
+            </a:r>
+            <a:r>
+              <a:rPr sz="1100" dirty="0" err="1">
+                <a:solidFill>
+                  <a:srgbClr val="222222"/>
+                </a:solidFill>
+                <a:latin typeface="Apple SD Gothic Neo"/>
+              </a:rPr>
+              <a:t>보관하지</a:t>
+            </a:r>
+            <a:r>
+              <a:rPr sz="1100" dirty="0">
+                <a:solidFill>
+                  <a:srgbClr val="222222"/>
+                </a:solidFill>
+                <a:latin typeface="Apple SD Gothic Neo"/>
+              </a:rPr>
+              <a:t> </a:t>
+            </a:r>
+            <a:r>
+              <a:rPr sz="1100" dirty="0" err="1">
+                <a:solidFill>
+                  <a:srgbClr val="222222"/>
+                </a:solidFill>
+                <a:latin typeface="Apple SD Gothic Neo"/>
+              </a:rPr>
+              <a:t>않으며</a:t>
+            </a:r>
+            <a:r>
+              <a:rPr sz="1100" dirty="0">
+                <a:solidFill>
+                  <a:srgbClr val="222222"/>
+                </a:solidFill>
+                <a:latin typeface="Apple SD Gothic Neo"/>
+              </a:rPr>
+              <a:t>, </a:t>
+            </a:r>
+            <a:r>
+              <a:rPr sz="1100" dirty="0" err="1">
+                <a:solidFill>
+                  <a:srgbClr val="222222"/>
+                </a:solidFill>
+                <a:latin typeface="Apple SD Gothic Neo"/>
+              </a:rPr>
+              <a:t>토스페이먼츠가</a:t>
+            </a:r>
+            <a:r>
+              <a:rPr sz="1100" dirty="0">
+                <a:solidFill>
+                  <a:srgbClr val="222222"/>
+                </a:solidFill>
+                <a:latin typeface="Apple SD Gothic Neo"/>
+              </a:rPr>
+              <a:t> </a:t>
+            </a:r>
+            <a:r>
+              <a:rPr sz="1100" dirty="0" err="1">
+                <a:solidFill>
+                  <a:srgbClr val="222222"/>
+                </a:solidFill>
+                <a:latin typeface="Apple SD Gothic Neo"/>
+              </a:rPr>
+              <a:t>직접</a:t>
+            </a:r>
+            <a:r>
+              <a:rPr sz="1100" dirty="0">
+                <a:solidFill>
+                  <a:srgbClr val="222222"/>
+                </a:solidFill>
+                <a:latin typeface="Apple SD Gothic Neo"/>
+              </a:rPr>
+              <a:t> </a:t>
+            </a:r>
+            <a:r>
+              <a:rPr sz="1100" dirty="0" err="1">
+                <a:solidFill>
+                  <a:srgbClr val="222222"/>
+                </a:solidFill>
+                <a:latin typeface="Apple SD Gothic Neo"/>
+              </a:rPr>
+              <a:t>처리</a:t>
+            </a:r>
+            <a:endParaRPr sz="1100" dirty="0">
+              <a:solidFill>
+                <a:srgbClr val="222222"/>
+              </a:solidFill>
+              <a:latin typeface="Apple SD Gothic Neo"/>
+            </a:endParaRPr>
           </a:p>
         </p:txBody>
       </p:sp>
@@ -4774,7 +5857,7 @@
 </file>
 
 <file path=ppt/slides/slide8.xml><?xml version="1.0" encoding="utf-8"?>
-<p:sld xmlns:a="http://schemas.openxmlformats.org/drawingml/2006/main" xmlns:p="http://schemas.openxmlformats.org/presentationml/2006/main" xmlns:r="http://schemas.openxmlformats.org/officeDocument/2006/relationships">
+<p:sld xmlns:a="http://schemas.openxmlformats.org/drawingml/2006/main" xmlns:r="http://schemas.openxmlformats.org/officeDocument/2006/relationships" xmlns:p="http://schemas.openxmlformats.org/presentationml/2006/main">
   <p:cSld>
     <p:spTree>
       <p:nvGrpSpPr>
@@ -4782,7 +5865,14 @@
         <p:cNvGrpSpPr/>
         <p:nvPr/>
       </p:nvGrpSpPr>
-      <p:grpSpPr/>
+      <p:grpSpPr>
+        <a:xfrm>
+          <a:off x="0" y="0"/>
+          <a:ext cx="0" cy="0"/>
+          <a:chOff x="0" y="0"/>
+          <a:chExt cx="0" cy="0"/>
+        </a:xfrm>
+      </p:grpSpPr>
       <p:sp>
         <p:nvSpPr>
           <p:cNvPr id="2" name="TextBox 1"/>
@@ -4872,15 +5962,12 @@
             </a:r>
           </a:p>
           <a:p>
-            <a:r>
-              <a:rPr sz="1500">
-                <a:solidFill>
-                  <a:srgbClr val="222222"/>
-                </a:solidFill>
-                <a:latin typeface="Apple SD Gothic Neo"/>
-              </a:rPr>
-              <a:t/>
-            </a:r>
+            <a:endParaRPr sz="1500">
+              <a:solidFill>
+                <a:srgbClr val="222222"/>
+              </a:solidFill>
+              <a:latin typeface="Apple SD Gothic Neo"/>
+            </a:endParaRPr>
           </a:p>
           <a:p>
             <a:r>
